--- a/service/marketing-studio/samples/tips-v1/canva/TIPS_광고_피드_4x5.pptx
+++ b/service/marketing-studio/samples/tips-v1/canva/TIPS_광고_피드_4x5.pptx
@@ -3216,9 +3216,9 @@
                 <a:solidFill>
                   <a:srgbClr val="2DD4BF"/>
                 </a:solidFill>
-                <a:latin typeface="Pretendard"/>
-                <a:ea typeface="Pretendard"/>
-                <a:cs typeface="Pretendard"/>
+                <a:latin typeface="Noto Sans KR"/>
+                <a:ea typeface="Noto Sans KR"/>
+                <a:cs typeface="Noto Sans KR"/>
               </a:rPr>
               <a:t>개발자 없는 창업팀</a:t>
             </a:r>
@@ -3234,7 +3234,7 @@
         <p:spPr>
           <a:xfrm>
             <a:off x="838200" y="2038350"/>
-            <a:ext cx="6563910" cy="3207246"/>
+            <a:ext cx="7790780" cy="3207246"/>
           </a:xfrm>
           <a:prstGeom prst="rect">
             <a:avLst/>
@@ -3257,9 +3257,9 @@
                 <a:solidFill>
                   <a:srgbClr val="FFFFFF"/>
                 </a:solidFill>
-                <a:latin typeface="Pretendard"/>
-                <a:ea typeface="Pretendard"/>
-                <a:cs typeface="Pretendard"/>
+                <a:latin typeface="Noto Sans KR"/>
+                <a:ea typeface="Noto Sans KR"/>
+                <a:cs typeface="Noto Sans KR"/>
               </a:rPr>
               <a:t>TIPS 준비,</a:t>
             </a:r>
@@ -3275,9 +3275,9 @@
                 <a:solidFill>
                   <a:srgbClr val="FFFFFF"/>
                 </a:solidFill>
-                <a:latin typeface="Pretendard"/>
-                <a:ea typeface="Pretendard"/>
-                <a:cs typeface="Pretendard"/>
+                <a:latin typeface="Noto Sans KR"/>
+                <a:ea typeface="Noto Sans KR"/>
+                <a:cs typeface="Noto Sans KR"/>
               </a:rPr>
               <a:t>사업계획서보다</a:t>
             </a:r>
@@ -3293,9 +3293,9 @@
                 <a:solidFill>
                   <a:srgbClr val="2DD4BF"/>
                 </a:solidFill>
-                <a:latin typeface="Pretendard"/>
-                <a:ea typeface="Pretendard"/>
-                <a:cs typeface="Pretendard"/>
+                <a:latin typeface="Noto Sans KR"/>
+                <a:ea typeface="Noto Sans KR"/>
+                <a:cs typeface="Noto Sans KR"/>
               </a:rPr>
               <a:t>순서가 먼저입니다</a:t>
             </a:r>
@@ -3311,7 +3311,7 @@
         <p:spPr>
           <a:xfrm>
             <a:off x="838200" y="5610969"/>
-            <a:ext cx="4637529" cy="842962"/>
+            <a:ext cx="5519105" cy="842962"/>
           </a:xfrm>
           <a:prstGeom prst="rect">
             <a:avLst/>
@@ -3334,9 +3334,9 @@
                 <a:solidFill>
                   <a:srgbClr val="C5C8CF"/>
                 </a:solidFill>
-                <a:latin typeface="Pretendard"/>
-                <a:ea typeface="Pretendard"/>
-                <a:cs typeface="Pretendard"/>
+                <a:latin typeface="Noto Sans KR"/>
+                <a:ea typeface="Noto Sans KR"/>
+                <a:cs typeface="Noto Sans KR"/>
               </a:rPr>
               <a:t>사업 축과 기술 축이 만나는 자리,</a:t>
             </a:r>
@@ -3352,9 +3352,9 @@
                 <a:solidFill>
                   <a:srgbClr val="C5C8CF"/>
                 </a:solidFill>
-                <a:latin typeface="Pretendard"/>
-                <a:ea typeface="Pretendard"/>
-                <a:cs typeface="Pretendard"/>
+                <a:latin typeface="Noto Sans KR"/>
+                <a:ea typeface="Noto Sans KR"/>
+                <a:cs typeface="Noto Sans KR"/>
               </a:rPr>
               <a:t>우리 회사 지금 위치부터 진단합니다.</a:t>
             </a:r>
@@ -3435,9 +3435,9 @@
                 <a:solidFill>
                   <a:srgbClr val="2DD4BF"/>
                 </a:solidFill>
-                <a:latin typeface="Pretendard"/>
-                <a:ea typeface="Pretendard"/>
-                <a:cs typeface="Pretendard"/>
+                <a:latin typeface="Noto Sans KR"/>
+                <a:ea typeface="Noto Sans KR"/>
+                <a:cs typeface="Noto Sans KR"/>
               </a:rPr>
               <a:t>✓ </a:t>
             </a:r>
@@ -3446,9 +3446,9 @@
                 <a:solidFill>
                   <a:srgbClr val="FFFFFF"/>
                 </a:solidFill>
-                <a:latin typeface="Pretendard"/>
-                <a:ea typeface="Pretendard"/>
-                <a:cs typeface="Pretendard"/>
+                <a:latin typeface="Noto Sans KR"/>
+                <a:ea typeface="Noto Sans KR"/>
+                <a:cs typeface="Noto Sans KR"/>
               </a:rPr>
               <a:t>사업 축 정의</a:t>
             </a:r>
@@ -3529,9 +3529,9 @@
                 <a:solidFill>
                   <a:srgbClr val="2DD4BF"/>
                 </a:solidFill>
-                <a:latin typeface="Pretendard"/>
-                <a:ea typeface="Pretendard"/>
-                <a:cs typeface="Pretendard"/>
+                <a:latin typeface="Noto Sans KR"/>
+                <a:ea typeface="Noto Sans KR"/>
+                <a:cs typeface="Noto Sans KR"/>
               </a:rPr>
               <a:t>✓ </a:t>
             </a:r>
@@ -3540,9 +3540,9 @@
                 <a:solidFill>
                   <a:srgbClr val="FFFFFF"/>
                 </a:solidFill>
-                <a:latin typeface="Pretendard"/>
-                <a:ea typeface="Pretendard"/>
-                <a:cs typeface="Pretendard"/>
+                <a:latin typeface="Noto Sans KR"/>
+                <a:ea typeface="Noto Sans KR"/>
+                <a:cs typeface="Noto Sans KR"/>
               </a:rPr>
               <a:t>기술 축 3단 질문</a:t>
             </a:r>
@@ -3623,9 +3623,9 @@
                 <a:solidFill>
                   <a:srgbClr val="2DD4BF"/>
                 </a:solidFill>
-                <a:latin typeface="Pretendard"/>
-                <a:ea typeface="Pretendard"/>
-                <a:cs typeface="Pretendard"/>
+                <a:latin typeface="Noto Sans KR"/>
+                <a:ea typeface="Noto Sans KR"/>
+                <a:cs typeface="Noto Sans KR"/>
               </a:rPr>
               <a:t>✓ </a:t>
             </a:r>
@@ -3634,9 +3634,9 @@
                 <a:solidFill>
                   <a:srgbClr val="FFFFFF"/>
                 </a:solidFill>
-                <a:latin typeface="Pretendard"/>
-                <a:ea typeface="Pretendard"/>
-                <a:cs typeface="Pretendard"/>
+                <a:latin typeface="Noto Sans KR"/>
+                <a:ea typeface="Noto Sans KR"/>
+                <a:cs typeface="Noto Sans KR"/>
               </a:rPr>
               <a:t>현재 위치 진단</a:t>
             </a:r>
@@ -3739,9 +3739,9 @@
                 <a:solidFill>
                   <a:srgbClr val="FFFFFF"/>
                 </a:solidFill>
-                <a:latin typeface="Pretendard"/>
-                <a:ea typeface="Pretendard"/>
-                <a:cs typeface="Pretendard"/>
+                <a:latin typeface="Noto Sans KR"/>
+                <a:ea typeface="Noto Sans KR"/>
+                <a:cs typeface="Noto Sans KR"/>
               </a:rPr>
               <a:t>실제 진단 화면</a:t>
             </a:r>
@@ -3801,7 +3801,7 @@
         <p:spPr>
           <a:xfrm>
             <a:off x="1219200" y="11510962"/>
-            <a:ext cx="3110749" cy="409575"/>
+            <a:ext cx="3718657" cy="409575"/>
           </a:xfrm>
           <a:prstGeom prst="rect">
             <a:avLst/>
@@ -3820,9 +3820,9 @@
                 <a:solidFill>
                   <a:srgbClr val="16243D"/>
                 </a:solidFill>
-                <a:latin typeface="Pretendard"/>
-                <a:ea typeface="Pretendard"/>
-                <a:cs typeface="Pretendard"/>
+                <a:latin typeface="Noto Sans KR"/>
+                <a:ea typeface="Noto Sans KR"/>
+                <a:cs typeface="Noto Sans KR"/>
               </a:rPr>
               <a:t>AX 수준 진단받아보기</a:t>
             </a:r>
@@ -3838,7 +3838,7 @@
         <p:spPr>
           <a:xfrm>
             <a:off x="8760916" y="11510962"/>
-            <a:ext cx="363397" cy="409575"/>
+            <a:ext cx="478854" cy="409575"/>
           </a:xfrm>
           <a:prstGeom prst="rect">
             <a:avLst/>
@@ -3857,9 +3857,9 @@
                 <a:solidFill>
                   <a:srgbClr val="16243D"/>
                 </a:solidFill>
-                <a:latin typeface="Pretendard"/>
-                <a:ea typeface="Pretendard"/>
-                <a:cs typeface="Pretendard"/>
+                <a:latin typeface="Noto Sans KR"/>
+                <a:ea typeface="Noto Sans KR"/>
+                <a:cs typeface="Noto Sans KR"/>
               </a:rPr>
               <a:t>→</a:t>
             </a:r>

--- a/service/marketing-studio/samples/tips-v1/canva/TIPS_광고_피드_4x5.pptx
+++ b/service/marketing-studio/samples/tips-v1/canva/TIPS_광고_피드_4x5.pptx
@@ -3112,7 +3112,7 @@
         </p:blipFill>
         <p:spPr>
           <a:xfrm>
-            <a:off x="838200" y="962025"/>
+            <a:off x="838200" y="963811"/>
             <a:ext cx="540544" cy="381000"/>
           </a:xfrm>
           <a:prstGeom prst="rect">
@@ -3136,7 +3136,7 @@
         </p:blipFill>
         <p:spPr>
           <a:xfrm>
-            <a:off x="1512094" y="1009650"/>
+            <a:off x="1512094" y="1011436"/>
             <a:ext cx="1728043" cy="285750"/>
           </a:xfrm>
           <a:prstGeom prst="rect">
@@ -3152,8 +3152,8 @@
         </p:nvSpPr>
         <p:spPr>
           <a:xfrm>
-            <a:off x="7504212" y="914400"/>
-            <a:ext cx="1944588" cy="476250"/>
+            <a:off x="7392888" y="914400"/>
+            <a:ext cx="2055912" cy="479971"/>
           </a:xfrm>
           <a:prstGeom prst="roundRect">
             <a:avLst>
@@ -3196,8 +3196,8 @@
         </p:nvSpPr>
         <p:spPr>
           <a:xfrm>
-            <a:off x="7504212" y="914400"/>
-            <a:ext cx="1944588" cy="476250"/>
+            <a:off x="7392888" y="914400"/>
+            <a:ext cx="2055912" cy="479971"/>
           </a:xfrm>
           <a:prstGeom prst="rect">
             <a:avLst/>
@@ -3210,7 +3210,11 @@
           </a:bodyPr>
           <a:lstStyle/>
           <a:p>
-            <a:pPr algn="ctr"/>
+            <a:pPr algn="ctr">
+              <a:lnSpc>
+                <a:spcPts val="1979"/>
+              </a:lnSpc>
+            </a:pPr>
             <a:r>
               <a:rPr sz="1650" b="1" spc="-18">
                 <a:solidFill>
@@ -3233,8 +3237,8 @@
         </p:nvSpPr>
         <p:spPr>
           <a:xfrm>
-            <a:off x="838200" y="2038350"/>
-            <a:ext cx="7790780" cy="3207246"/>
+            <a:off x="838200" y="2059406"/>
+            <a:ext cx="8364885" cy="3182100"/>
           </a:xfrm>
           <a:prstGeom prst="rect">
             <a:avLst/>
@@ -3310,8 +3314,8 @@
         </p:nvSpPr>
         <p:spPr>
           <a:xfrm>
-            <a:off x="838200" y="5610969"/>
-            <a:ext cx="5519105" cy="842962"/>
+            <a:off x="838200" y="5559921"/>
+            <a:ext cx="5909965" cy="942975"/>
           </a:xfrm>
           <a:prstGeom prst="rect">
             <a:avLst/>
@@ -3369,12 +3373,12 @@
         </p:nvSpPr>
         <p:spPr>
           <a:xfrm>
-            <a:off x="838200" y="6925419"/>
-            <a:ext cx="1890117" cy="581025"/>
+            <a:off x="838200" y="6929140"/>
+            <a:ext cx="2033141" cy="582811"/>
           </a:xfrm>
           <a:prstGeom prst="roundRect">
             <a:avLst>
-              <a:gd name="adj" fmla="val 22950"/>
+              <a:gd name="adj" fmla="val 22880"/>
             </a:avLst>
           </a:prstGeom>
           <a:solidFill>
@@ -3415,8 +3419,8 @@
         </p:nvSpPr>
         <p:spPr>
           <a:xfrm>
-            <a:off x="838200" y="6925419"/>
-            <a:ext cx="1890117" cy="581025"/>
+            <a:off x="838200" y="6929140"/>
+            <a:ext cx="2033141" cy="582811"/>
           </a:xfrm>
           <a:prstGeom prst="rect">
             <a:avLst/>
@@ -3429,7 +3433,11 @@
           </a:bodyPr>
           <a:lstStyle/>
           <a:p>
-            <a:pPr algn="ctr"/>
+            <a:pPr algn="ctr">
+              <a:lnSpc>
+                <a:spcPts val="2340"/>
+              </a:lnSpc>
+            </a:pPr>
             <a:r>
               <a:rPr sz="1950" b="1">
                 <a:solidFill>
@@ -3463,12 +3471,12 @@
         </p:nvSpPr>
         <p:spPr>
           <a:xfrm>
-            <a:off x="2861667" y="6925419"/>
-            <a:ext cx="2319338" cy="581025"/>
+            <a:off x="3004691" y="6929140"/>
+            <a:ext cx="2476351" cy="582811"/>
           </a:xfrm>
           <a:prstGeom prst="roundRect">
             <a:avLst>
-              <a:gd name="adj" fmla="val 22950"/>
+              <a:gd name="adj" fmla="val 22880"/>
             </a:avLst>
           </a:prstGeom>
           <a:solidFill>
@@ -3509,8 +3517,8 @@
         </p:nvSpPr>
         <p:spPr>
           <a:xfrm>
-            <a:off x="2861667" y="6925419"/>
-            <a:ext cx="2319338" cy="581025"/>
+            <a:off x="3004691" y="6929140"/>
+            <a:ext cx="2476351" cy="582811"/>
           </a:xfrm>
           <a:prstGeom prst="rect">
             <a:avLst/>
@@ -3523,7 +3531,11 @@
           </a:bodyPr>
           <a:lstStyle/>
           <a:p>
-            <a:pPr algn="ctr"/>
+            <a:pPr algn="ctr">
+              <a:lnSpc>
+                <a:spcPts val="2340"/>
+              </a:lnSpc>
+            </a:pPr>
             <a:r>
               <a:rPr sz="1950" b="1">
                 <a:solidFill>
@@ -3557,12 +3569,12 @@
         </p:nvSpPr>
         <p:spPr>
           <a:xfrm>
-            <a:off x="5314355" y="6925419"/>
-            <a:ext cx="2104132" cy="581025"/>
+            <a:off x="5614392" y="6929140"/>
+            <a:ext cx="2260997" cy="582811"/>
           </a:xfrm>
           <a:prstGeom prst="roundRect">
             <a:avLst>
-              <a:gd name="adj" fmla="val 22950"/>
+              <a:gd name="adj" fmla="val 22880"/>
             </a:avLst>
           </a:prstGeom>
           <a:solidFill>
@@ -3603,8 +3615,8 @@
         </p:nvSpPr>
         <p:spPr>
           <a:xfrm>
-            <a:off x="5314355" y="6925419"/>
-            <a:ext cx="2104132" cy="581025"/>
+            <a:off x="5614392" y="6929140"/>
+            <a:ext cx="2260997" cy="582811"/>
           </a:xfrm>
           <a:prstGeom prst="rect">
             <a:avLst/>
@@ -3617,7 +3629,11 @@
           </a:bodyPr>
           <a:lstStyle/>
           <a:p>
-            <a:pPr algn="ctr"/>
+            <a:pPr algn="ctr">
+              <a:lnSpc>
+                <a:spcPts val="2340"/>
+              </a:lnSpc>
+            </a:pPr>
             <a:r>
               <a:rPr sz="1950" b="1">
                 <a:solidFill>
@@ -3676,7 +3692,7 @@
         <p:spPr>
           <a:xfrm>
             <a:off x="1047750" y="8077200"/>
-            <a:ext cx="1304330" cy="342900"/>
+            <a:ext cx="1386929" cy="342900"/>
           </a:xfrm>
           <a:prstGeom prst="roundRect">
             <a:avLst>
@@ -3720,7 +3736,7 @@
         <p:spPr>
           <a:xfrm>
             <a:off x="1047750" y="8077200"/>
-            <a:ext cx="1304330" cy="342900"/>
+            <a:ext cx="1386929" cy="342900"/>
           </a:xfrm>
           <a:prstGeom prst="rect">
             <a:avLst/>
@@ -3733,7 +3749,11 @@
           </a:bodyPr>
           <a:lstStyle/>
           <a:p>
-            <a:pPr algn="ctr"/>
+            <a:pPr algn="ctr">
+              <a:lnSpc>
+                <a:spcPts val="1800"/>
+              </a:lnSpc>
+            </a:pPr>
             <a:r>
               <a:rPr sz="1500" b="1">
                 <a:solidFill>
@@ -3800,8 +3820,8 @@
         </p:nvSpPr>
         <p:spPr>
           <a:xfrm>
-            <a:off x="1219200" y="11510962"/>
-            <a:ext cx="3718657" cy="409575"/>
+            <a:off x="1219200" y="11504355"/>
+            <a:ext cx="3874926" cy="411480"/>
           </a:xfrm>
           <a:prstGeom prst="rect">
             <a:avLst/>
@@ -3814,7 +3834,11 @@
           </a:bodyPr>
           <a:lstStyle/>
           <a:p>
-            <a:pPr algn="l"/>
+            <a:pPr algn="l">
+              <a:lnSpc>
+                <a:spcPts val="3240"/>
+              </a:lnSpc>
+            </a:pPr>
             <a:r>
               <a:rPr sz="2700" b="1" spc="-81">
                 <a:solidFill>
@@ -3837,8 +3861,8 @@
         </p:nvSpPr>
         <p:spPr>
           <a:xfrm>
-            <a:off x="8760916" y="11510962"/>
-            <a:ext cx="478854" cy="409575"/>
+            <a:off x="8735169" y="11504355"/>
+            <a:ext cx="511039" cy="411480"/>
           </a:xfrm>
           <a:prstGeom prst="rect">
             <a:avLst/>
@@ -3851,7 +3875,11 @@
           </a:bodyPr>
           <a:lstStyle/>
           <a:p>
-            <a:pPr algn="l"/>
+            <a:pPr algn="l">
+              <a:lnSpc>
+                <a:spcPts val="3240"/>
+              </a:lnSpc>
+            </a:pPr>
             <a:r>
               <a:rPr sz="2700" b="1" spc="-81">
                 <a:solidFill>
